--- a/level4/slides/Level4_Lesson11_Slides.pptx
+++ b/level4/slides/Level4_Lesson11_Slides.pptx
@@ -1181,7 +1181,7 @@
           </a:p>
           <a:p>
             <a:r>
-              <a:t>No speaker? Read the script with a volunteer at a natural, friendly speed, two times. Say gonna and wanna where the script has them.</a:t>
+              <a:t>No speaker? Read the script with a volunteer at a natural, friendly speed, two times. The script says going to and want to. People often say gonna and wanna; learners only need to recognize those words.</a:t>
             </a:r>
           </a:p>
           <a:p>
@@ -1216,7 +1216,7 @@
           </a:p>
           <a:p>
             <a:r>
-              <a:t>Ms. Adams: Sure, Luis. When do you wanna take it?</a:t>
+              <a:t>Ms. Adams: Sure, Luis. When do you want to take it?</a:t>
             </a:r>
           </a:p>
           <a:p>
@@ -1266,7 +1266,7 @@
           </a:p>
           <a:p>
             <a:r>
-              <a:t>Luis: Hi, Rosa, it's Luis. I'm calling to tell you about my trip. I'm gonna take the bus on Thursday, June fifth. It's bus number forty-two, and it gets to San Antonio at six thirty p.m. Can you pick me up at the bus station? Also, don't forget to bring Mom's birthday card. I want everyone to sign it. Call me back at five five five, two one four, eight eight three zero. Bye!</a:t>
+              <a:t>Luis: Hi, Rosa, it's Luis. I'm calling to tell you about my trip. I'm going to take the bus on Thursday, June fifth. It's bus number forty-two, and it gets to San Antonio at six thirty p.m. Can you pick me up at the bus station? Also, don't forget to bring Mom's birthday card. I want everyone to sign it. Call me back at five five five, two one four, eight eight three zero. Bye!</a:t>
             </a:r>
           </a:p>
           <a:p>
@@ -1281,7 +1281,7 @@
           </a:p>
           <a:p>
             <a:r>
-              <a:t>Rosa: No, it's a surprise. She's gonna be so happy. I enjoy planning surprises!</a:t>
+              <a:t>Rosa: No, it's a surprise. She's going to be so happy. I enjoy planning surprises!</a:t>
             </a:r>
           </a:p>
           <a:p>
@@ -1606,12 +1606,12 @@
           <a:lstStyle/>
           <a:p>
             <a:r>
-              <a:t>"Hear it, say it" (3 min): Point to the script lines. wanna = want to: "When do you wanna take it?" gonna = going to: "I'm gonna take the bus." Then practice the phone number in groups with pauses: 555 · 214 · 8830. The class repeats the two lines twice.</a:t>
-            </a:r>
-          </a:p>
-          <a:p>
-            <a:r>
-              <a:t>Reductions: the listening has gonna and wanna. Learners need to understand them; saying them is optional, and they never write them.</a:t>
+              <a:t>"Hear it, say it" (3 min): Point to the script lines. wanna = want to: "When do you want to take it?" gonna = going to: "I'm going to take the bus." Then practice the phone number in groups with pauses: 555 · 214 · 8830. The class repeats the two lines twice.</a:t>
+            </a:r>
+          </a:p>
+          <a:p>
+            <a:r>
+              <a:t>Reductions: the listening says going to and want to. People often say gonna and wanna. Learners only need to recognize the short forms, and they never write them.</a:t>
             </a:r>
           </a:p>
           <a:p>
@@ -16527,6 +16527,17 @@
               <a:buNone/>
             </a:pPr>
             <a:r>
+              <a:rPr lang="en-US" sz="2000" dirty="0" b="1">
+                <a:solidFill>
+                  <a:srgbClr val="5B3FC4"/>
+                </a:solidFill>
+                <a:latin typeface="Lexend Deca" pitchFamily="34" charset="0"/>
+                <a:ea typeface="Lexend Deca" pitchFamily="34" charset="-122"/>
+                <a:cs typeface="Lexend Deca" pitchFamily="34" charset="-120"/>
+              </a:rPr>
+              <a:t>gonna</a:t>
+            </a:r>
+            <a:r>
               <a:rPr lang="en-US" sz="2000" dirty="0">
                 <a:solidFill>
                   <a:srgbClr val="1B2236"/>
@@ -16535,7 +16546,7 @@
                 <a:ea typeface="Lexend Deca" pitchFamily="34" charset="-122"/>
                 <a:cs typeface="Lexend Deca" pitchFamily="34" charset="-120"/>
               </a:rPr>
-              <a:t>You will hear </a:t>
+              <a:t> and </a:t>
             </a:r>
             <a:r>
               <a:rPr lang="en-US" sz="2000" dirty="0" b="1">
@@ -16546,7 +16557,7 @@
                 <a:ea typeface="Lexend Deca" pitchFamily="34" charset="-122"/>
                 <a:cs typeface="Lexend Deca" pitchFamily="34" charset="-120"/>
               </a:rPr>
-              <a:t>gonna</a:t>
+              <a:t>wanna</a:t>
             </a:r>
             <a:r>
               <a:rPr lang="en-US" sz="2000" dirty="0">
@@ -16557,29 +16568,7 @@
                 <a:ea typeface="Lexend Deca" pitchFamily="34" charset="-122"/>
                 <a:cs typeface="Lexend Deca" pitchFamily="34" charset="-120"/>
               </a:rPr>
-              <a:t> and </a:t>
-            </a:r>
-            <a:r>
-              <a:rPr lang="en-US" sz="2000" dirty="0" b="1">
-                <a:solidFill>
-                  <a:srgbClr val="5B3FC4"/>
-                </a:solidFill>
-                <a:latin typeface="Lexend Deca" pitchFamily="34" charset="0"/>
-                <a:ea typeface="Lexend Deca" pitchFamily="34" charset="-122"/>
-                <a:cs typeface="Lexend Deca" pitchFamily="34" charset="-120"/>
-              </a:rPr>
-              <a:t>wanna</a:t>
-            </a:r>
-            <a:r>
-              <a:rPr lang="en-US" sz="2000" dirty="0">
-                <a:solidFill>
-                  <a:srgbClr val="1B2236"/>
-                </a:solidFill>
-                <a:latin typeface="Lexend Deca" pitchFamily="34" charset="0"/>
-                <a:ea typeface="Lexend Deca" pitchFamily="34" charset="-122"/>
-                <a:cs typeface="Lexend Deca" pitchFamily="34" charset="-120"/>
-              </a:rPr>
-              <a:t>.</a:t>
+              <a:t> are short forms. This listening uses the full forms.</a:t>
             </a:r>
             <a:endParaRPr lang="en-US" sz="2000" dirty="0"/>
           </a:p>
@@ -16734,7 +16723,7 @@
                 <a:ea typeface="Lexend Deca" pitchFamily="34" charset="-122"/>
                 <a:cs typeface="Lexend Deca" pitchFamily="34" charset="-120"/>
               </a:rPr>
-              <a:t>wanna</a:t>
+              <a:t>want to</a:t>
             </a:r>
             <a:r>
               <a:rPr lang="en-US" sz="1800" dirty="0" b="1">
@@ -16821,7 +16810,7 @@
                 <a:ea typeface="Lexend Deca" pitchFamily="34" charset="-122"/>
                 <a:cs typeface="Lexend Deca" pitchFamily="34" charset="-120"/>
               </a:rPr>
-              <a:t>gonna</a:t>
+              <a:t>going to</a:t>
             </a:r>
             <a:r>
               <a:rPr lang="en-US" sz="1800" dirty="0" b="1">

--- a/level4/slides/Level4_Lesson11_Slides.pptx
+++ b/level4/slides/Level4_Lesson11_Slides.pptx
@@ -1216,12 +1216,12 @@
           </a:p>
           <a:p>
             <a:r>
-              <a:t>Ms. Adams: Sure, Luis. When do you want to take it?</a:t>
-            </a:r>
-          </a:p>
-          <a:p>
-            <a:r>
-              <a:t>Luis: Next month, from Thursday, June fifth, to Saturday, June seventh. That's three days.</a:t>
+              <a:t>Ms. Adams: Sure. When do you want to take the time off?</a:t>
+            </a:r>
+          </a:p>
+          <a:p>
+            <a:r>
+              <a:t>Luis: Next month, from Thursday the fifth of June to Saturday the seventh of June. That's three days.</a:t>
             </a:r>
           </a:p>
           <a:p>
@@ -1231,7 +1231,7 @@
           </a:p>
           <a:p>
             <a:r>
-              <a:t>Luis: To visit my mother in San Antonio. It's her seventieth birthday.</a:t>
+              <a:t>Luis: To visit my mother in San Antonio. She is turning seventy.</a:t>
             </a:r>
           </a:p>
           <a:p>
@@ -1251,7 +1251,7 @@
           </a:p>
           <a:p>
             <a:r>
-              <a:t>Luis: Ana has agreed to cover Thursday and Friday. I'm still looking for someone for Saturday.</a:t>
+              <a:t>Luis: Anna has agreed to cover Thursday and Friday. I'm still looking for someone for Saturday.</a:t>
             </a:r>
           </a:p>
           <a:p>
@@ -1266,7 +1266,7 @@
           </a:p>
           <a:p>
             <a:r>
-              <a:t>Luis: Hi, Rosa, it's Luis. I'm calling to tell you about my trip. I'm going to take the bus on Thursday, June fifth. It's bus number forty-two, and it gets to San Antonio at six thirty p.m. Can you pick me up at the bus station? Also, don't forget to bring Mom's birthday card. I want everyone to sign it. Call me back at five five five, two one four, eight eight three zero. Bye!</a:t>
+              <a:t>Luis: Hi, Rosa, it's Luis. I'm calling to tell you about my trip. I'm going to take the bus on Thursday, June fifth. It's bus number forty-two, and it gets to San Antonio at six thirty in the evening. Can you pick me up at the bus station? Also, don't forget to bring Mom's birthday card. I want everyone to sign it. Call me back at five five five, two one four, eight eight three zero. Bye!</a:t>
             </a:r>
           </a:p>
           <a:p>
@@ -13527,7 +13527,7 @@
             </a:pPr>
             <a:r>
               <a:rPr lang="en-US" sz="1600" dirty="0"/>
-              <a:t>3. Ana will cover</a:t>
+              <a:t>3. Anna will cover</a:t>
             </a:r>
             <a:endParaRPr lang="en-US" sz="1600" dirty="0"/>
           </a:p>

--- a/level4/slides/Level4_Lesson11_Slides.pptx
+++ b/level4/slides/Level4_Lesson11_Slides.pptx
@@ -1176,7 +1176,7 @@
           </a:p>
           <a:p>
             <a:r>
-              <a:t>The audio (about 1:52) is coming soon. When it is ready, it plays the conversation once; press play again for play 2. Until then, read the listening script (at the end of these notes) with a volunteer.</a:t>
+              <a:t>The audio (L4_L11_listening.mp3, about 1:44) plays the conversation once. Press play again for play 2. A third play is fine if the class needs it.</a:t>
             </a:r>
           </a:p>
           <a:p>
@@ -1186,7 +1186,7 @@
           </a:p>
           <a:p>
             <a:r>
-              <a:t>Audio: the listening audio for this lesson (about 1:52) is coming soon. It will use computer-generated voices (Chatterbox TTS cloned from synthetic Kokoro-82M reference clips); no recordings of real people. Until it is ready, read the listening script (in the notes of the Before You Listen slide) with a volunteer. The names and the story are invented.</a:t>
+              <a:t>Audio: synthetic voices, computer-generated (Chatterbox TTS cloned from Kokoro-82M reference clips). No recordings of real people. The names and the story are invented.</a:t>
             </a:r>
           </a:p>
           <a:p>
@@ -1197,101 +1197,6 @@
           <a:p>
             <a:r>
               <a:t>Picture: Twemoji graphics by Twitter, Inc. and other contributors (https://github.com/jdecked/twemoji), CC BY 4.0 (https://creativecommons.org/licenses/by/4.0/); resized and combined, with signs and labels (images/CREDITS.md).</a:t>
-            </a:r>
-          </a:p>
-          <a:p>
-            <a:r>
-              <a:t>Listening script (the audio is coming soon; until then, read it aloud with a volunteer at a normal, friendly speed):</a:t>
-            </a:r>
-          </a:p>
-          <a:p>
-            <a:r>
-              <a:t>Narrator: Lesson eleven. Luis asks his supervisor for time off. Then he leaves a voicemail for his sister.</a:t>
-            </a:r>
-          </a:p>
-          <a:p>
-            <a:r>
-              <a:t>Luis: Ms. Adams, do you have a minute? I'd like to ask for some time off.</a:t>
-            </a:r>
-          </a:p>
-          <a:p>
-            <a:r>
-              <a:t>Ms. Adams: Sure. When do you want to take the time off?</a:t>
-            </a:r>
-          </a:p>
-          <a:p>
-            <a:r>
-              <a:t>Luis: Next month, from Thursday the fifth of June to Saturday the seventh of June. That's three days.</a:t>
-            </a:r>
-          </a:p>
-          <a:p>
-            <a:r>
-              <a:t>Ms. Adams: And why are you taking time off?</a:t>
-            </a:r>
-          </a:p>
-          <a:p>
-            <a:r>
-              <a:t>Luis: To visit my mother in San Antonio. She is turning seventy.</a:t>
-            </a:r>
-          </a:p>
-          <a:p>
-            <a:r>
-              <a:t>Ms. Adams: How nice! Did you fill out the request form?</a:t>
-            </a:r>
-          </a:p>
-          <a:p>
-            <a:r>
-              <a:t>Luis: Yes, I've already filled it out. Here it is.</a:t>
-            </a:r>
-          </a:p>
-          <a:p>
-            <a:r>
-              <a:t>Ms. Adams: Thanks. Who can cover your shifts?</a:t>
-            </a:r>
-          </a:p>
-          <a:p>
-            <a:r>
-              <a:t>Luis: Anna has agreed to cover Thursday and Friday. I'm still looking for someone for Saturday.</a:t>
-            </a:r>
-          </a:p>
-          <a:p>
-            <a:r>
-              <a:t>Ms. Adams: Ask Ben. He doesn't mind working on weekends. Then I can approve it.</a:t>
-            </a:r>
-          </a:p>
-          <a:p>
-            <a:r>
-              <a:t>Luis: Great. Thank you, Ms. Adams.</a:t>
-            </a:r>
-          </a:p>
-          <a:p>
-            <a:r>
-              <a:t>Luis: Hi, Rosa, it's Luis. I'm calling to tell you about my trip. I'm going to take the bus on Thursday, June fifth. It's bus number forty-two, and it gets to San Antonio at six thirty in the evening. Can you pick me up at the bus station? Also, don't forget to bring Mom's birthday card. I want everyone to sign it. Call me back at five five five, two one four, eight eight three zero. Bye!</a:t>
-            </a:r>
-          </a:p>
-          <a:p>
-            <a:r>
-              <a:t>Rosa: Hi, Luis! I got your message. Yes, I can pick you up at six thirty.</a:t>
-            </a:r>
-          </a:p>
-          <a:p>
-            <a:r>
-              <a:t>Luis: Thanks, Rosa. Mom doesn't know I'm coming, right?</a:t>
-            </a:r>
-          </a:p>
-          <a:p>
-            <a:r>
-              <a:t>Rosa: No, it's a surprise. She's going to be so happy. I enjoy planning surprises!</a:t>
-            </a:r>
-          </a:p>
-          <a:p>
-            <a:r>
-              <a:t>Luis: Me too. See you on Thursday!</a:t>
-            </a:r>
-          </a:p>
-          <a:p>
-            <a:r>
-              <a:t>Narrator: That's the end of the listening.</a:t>
             </a:r>
           </a:p>
         </p:txBody>
@@ -2771,7 +2676,7 @@
           </a:p>
           <a:p>
             <a:r>
-              <a:t>Audio: the listening audio for this lesson (about 1:52) is coming soon. It will use computer-generated voices (Chatterbox TTS cloned from synthetic Kokoro-82M reference clips); no recordings of real people. Until it is ready, read the listening script (in the notes of the Before You Listen slide) with a volunteer. The names and the story are invented.</a:t>
+              <a:t>Audio: synthetic voices, computer-generated (Chatterbox TTS cloned from Kokoro-82M reference clips). No recordings of real people. The names and the story are invented.</a:t>
             </a:r>
           </a:p>
           <a:p>
@@ -12113,7 +12018,7 @@
                 <a:ea typeface="Lexend Deca" pitchFamily="34" charset="-122"/>
                 <a:cs typeface="Lexend Deca" pitchFamily="34" charset="-120"/>
               </a:rPr>
-              <a:t>Audio (about 1:52): coming soon.</a:t>
+              <a:t>Audio: about 1:44. It plays once.</a:t>
             </a:r>
             <a:endParaRPr lang="en-US" sz="2200" dirty="0"/>
           </a:p>
@@ -31046,7 +30951,7 @@
                 <a:ea typeface="Lexend Deca" pitchFamily="34" charset="-122"/>
                 <a:cs typeface="Lexend Deca" pitchFamily="34" charset="-120"/>
               </a:rPr>
-              <a:t>Audio (coming soon): synthetic voices made with Chatterbox TTS (MIT License), cloned from short synthetic reference clips made with Kokoro-82M (Apache License 2.0). No recordings of real people. Each file will carry an inaudible Perth watermark marking it as AI-generated. Font: Lexend Deca (OFL 1.1).</a:t>
+              <a:t>Audio: synthetic voices made with Chatterbox TTS (MIT License), cloned from short synthetic reference clips made with Kokoro-82M (Apache License 2.0). No recordings of real people were used. Each file carries an inaudible Perth watermark marking it as AI-generated. Font: Lexend Deca (OFL 1.1).</a:t>
             </a:r>
             <a:endParaRPr lang="en-US" sz="1350" dirty="0" b="0"/>
           </a:p>

--- a/level4/slides/Level4_Lesson11_Slides.pptx
+++ b/level4/slides/Level4_Lesson11_Slides.pptx
@@ -1517,6 +1517,11 @@
           <a:p>
             <a:r>
               <a:t>Reductions: the listening says going to and want to. People often say gonna and wanna. Learners only need to recognize the short forms, and they never write them.</a:t>
+            </a:r>
+          </a:p>
+          <a:p>
+            <a:r>
+              <a:t>Everyday English: people often say gonna (going to) and wanna (want to). Learners will hear them often. They are fine in casual talk; in writing, at a job interview, or in a formal email, use going to and want to. The listening uses the full forms.</a:t>
             </a:r>
           </a:p>
           <a:p>
@@ -16451,7 +16456,7 @@
                 <a:ea typeface="Lexend Deca" pitchFamily="34" charset="-122"/>
                 <a:cs typeface="Lexend Deca" pitchFamily="34" charset="-120"/>
               </a:rPr>
-              <a:t> and </a:t>
+              <a:t> = going to, </a:t>
             </a:r>
             <a:r>
               <a:rPr lang="en-US" sz="2000" dirty="0" b="1">
@@ -16473,7 +16478,7 @@
                 <a:ea typeface="Lexend Deca" pitchFamily="34" charset="-122"/>
                 <a:cs typeface="Lexend Deca" pitchFamily="34" charset="-120"/>
               </a:rPr>
-              <a:t> are short forms. This listening uses the full forms.</a:t>
+              <a:t> = want to: fine in everyday talk.</a:t>
             </a:r>
             <a:endParaRPr lang="en-US" sz="2000" dirty="0"/>
           </a:p>
